--- a/curso_es/pptx/S45.pptx
+++ b/curso_es/pptx/S45.pptx
@@ -4417,7 +4417,7 @@
                 </a:solidFill>
                 <a:latin typeface="Nunito Sans"/>
               </a:rPr>
-              <a:t>El primer día, Aitor no saludó a nadie. Algunos decidieron: «Es un borde». En realidad, estaba nervioso.</a:t>
+              <a:t>El primer día de campamento, un chico no saludó a nadie. Algunos decidieron: «Es un borde». En realidad, estaba nervioso.</a:t>
             </a:r>
           </a:p>
         </p:txBody>
@@ -4490,7 +4490,7 @@
                 </a:solidFill>
                 <a:latin typeface="Nunito Sans"/>
               </a:rPr>
-              <a:t>Después, todo lo que hacía Aitor parecía confirmarla (sesión 44).</a:t>
+              <a:t>Después, todo lo que hacía ese chico parecía confirmarla (sesión 44).</a:t>
             </a:r>
           </a:p>
           <a:p>
@@ -4726,7 +4726,7 @@
                 </a:solidFill>
                 <a:latin typeface="Nunito Sans"/>
               </a:rPr>
-              <a:t>Para el equipo de fútbol del recreo, Leire elige primero a Aitor. Lo ha visto marcar muchos goles todas las semanas.</a:t>
+              <a:t>Para el equipo de fútbol del recreo, una chica elige primero a un chico. Lo ha visto marcar muchos goles todas las semanas.</a:t>
             </a:r>
           </a:p>
         </p:txBody>
@@ -5981,7 +5981,7 @@
                 </a:solidFill>
                 <a:latin typeface="Nunito Sans"/>
               </a:rPr>
-              <a:t>En la tarea 2-4-6 de Wason, la regla secreta era: tres números que van ______.  (sesión 44)</a:t>
+              <a:t>En la tarea 2-4-6, la regla era: tres números que van ______.  (sesión 44)</a:t>
             </a:r>
           </a:p>
           <a:p>
@@ -6183,7 +6183,7 @@
                 </a:solidFill>
                 <a:latin typeface="Nunito Sans"/>
               </a:rPr>
-              <a:t>En la tarea 2-4-6 de Wason, la regla secreta era: tres números que van </a:t>
+              <a:t>En la tarea 2-4-6, la regla era: tres números que van </a:t>
             </a:r>
             <a:r>
               <a:rPr sz="2600" b="1">
@@ -6434,7 +6434,7 @@
                 </a:solidFill>
                 <a:latin typeface="Nunito Sans"/>
               </a:rPr>
-              <a:t>Un chico nuevo llega a clase con ropa de marca y sonriendo. Otro llega serio y despeinado.</a:t>
+              <a:t>Dos candidatos a monitor del campamento: uno llega con ropa de marca y sonriendo; otro, serio y despeinado.</a:t>
             </a:r>
           </a:p>
         </p:txBody>
@@ -6473,7 +6473,7 @@
                 </a:solidFill>
                 <a:latin typeface="Nunito Sans"/>
               </a:rPr>
-              <a:t>¿Cuál crees que sacará mejores notas? ¿Por qué lo has pensado?</a:t>
+              <a:t>¿Cuál crees que será mejor monitor? ¿Por qué lo has pensado?</a:t>
             </a:r>
           </a:p>
         </p:txBody>
